--- a/Preventra_demo_slides.pptx
+++ b/Preventra_demo_slides.pptx
@@ -7,9 +7,10 @@
   <p:sldIdLst>
     <p:sldId id="256" r:id="rId2"/>
     <p:sldId id="257" r:id="rId3"/>
+    <p:sldId id="258" r:id="rId4"/>
   </p:sldIdLst>
   <p:notesMasterIdLst>
-    <p:notesMasterId r:id="rId4"/>
+    <p:notesMasterId r:id="rId5"/>
   </p:notesMasterIdLst>
   <p:sldSz cx="12192000" cy="6858000"/>
   <p:notesSz cx="6858000" cy="12192000"/>
@@ -633,6 +634,94 @@
 </p:notes>
 </file>
 
+<file path=ppt/notesSlides/notesSlide3.xml><?xml version="1.0" encoding="utf-8"?>
+<p:notes xmlns:a="http://schemas.openxmlformats.org/drawingml/2006/main" xmlns:r="http://schemas.openxmlformats.org/officeDocument/2006/relationships" xmlns:p="http://schemas.openxmlformats.org/presentationml/2006/main">
+  <p:cSld>
+    <p:spTree>
+      <p:nvGrpSpPr>
+        <p:cNvPr id="1" name=""/>
+        <p:cNvGrpSpPr/>
+        <p:nvPr/>
+      </p:nvGrpSpPr>
+      <p:grpSpPr>
+        <a:xfrm>
+          <a:off x="0" y="0"/>
+          <a:ext cx="0" cy="0"/>
+          <a:chOff x="0" y="0"/>
+          <a:chExt cx="0" cy="0"/>
+        </a:xfrm>
+      </p:grpSpPr>
+      <p:sp>
+        <p:nvSpPr>
+          <p:cNvPr id="2" name="Slide Image Placeholder 1"/>
+          <p:cNvSpPr>
+            <a:spLocks noGrp="1" noRot="1" noChangeAspect="1"/>
+          </p:cNvSpPr>
+          <p:nvPr>
+            <p:ph type="sldImg"/>
+          </p:nvPr>
+        </p:nvSpPr>
+        <p:spPr/>
+      </p:sp>
+      <p:sp>
+        <p:nvSpPr>
+          <p:cNvPr id="3" name="Notes Placeholder 2"/>
+          <p:cNvSpPr>
+            <a:spLocks noGrp="1"/>
+          </p:cNvSpPr>
+          <p:nvPr>
+            <p:ph type="body" idx="1"/>
+          </p:nvPr>
+        </p:nvSpPr>
+        <p:spPr/>
+        <p:txBody>
+          <a:bodyPr/>
+          <a:lstStyle/>
+          <a:p>
+            <a:r>
+              <a:rPr lang="en-US" dirty="0"/>
+              <a:t>A compressed version of the progress update: one platform with one sign-in, role-based access with hospitals kept apart, hospital dashboards in both apps, and rising-risk alerts plus the chatbot in Readmission.</a:t>
+            </a:r>
+            <a:endParaRPr lang="en-US" dirty="0"/>
+          </a:p>
+        </p:txBody>
+      </p:sp>
+      <p:sp>
+        <p:nvSpPr>
+          <p:cNvPr id="4" name="Slide Number Placeholder 3"/>
+          <p:cNvSpPr>
+            <a:spLocks noGrp="1"/>
+          </p:cNvSpPr>
+          <p:nvPr>
+            <p:ph type="sldNum" sz="quarter" idx="10"/>
+          </p:nvPr>
+        </p:nvSpPr>
+        <p:spPr/>
+        <p:txBody>
+          <a:bodyPr/>
+          <a:lstStyle/>
+          <a:p>
+            <a:fld id="{F7021451-1387-4CA6-816F-3879F97B5CBC}" type="slidenum">
+              <a:rPr lang="en-US"/>
+              <a:t>3</a:t>
+            </a:fld>
+            <a:endParaRPr lang="en-US"/>
+          </a:p>
+        </p:txBody>
+      </p:sp>
+    </p:spTree>
+    <p:extLst>
+      <p:ext uri="{BB962C8B-B14F-4D97-AF65-F5344CB8AC3E}">
+        <p14:creationId xmlns:p14="http://schemas.microsoft.com/office/powerpoint/2010/main" val="1024086991"/>
+      </p:ext>
+    </p:extLst>
+  </p:cSld>
+  <p:clrMapOvr>
+    <a:masterClrMapping/>
+  </p:clrMapOvr>
+</p:notes>
+</file>
+
 <file path=ppt/slideLayouts/slideLayout1.xml><?xml version="1.0" encoding="utf-8"?>
 <p:sldLayout xmlns:a="http://schemas.openxmlformats.org/drawingml/2006/main" xmlns:r="http://schemas.openxmlformats.org/officeDocument/2006/relationships" xmlns:p="http://schemas.openxmlformats.org/presentationml/2006/main" preserve="1">
   <p:cSld name="DEFAULT">
@@ -3733,6 +3822,794 @@
               <a:t>The same rules apply in both apps.</a:t>
             </a:r>
             <a:endParaRPr lang="en-US" sz="1300" dirty="0"/>
+          </a:p>
+        </p:txBody>
+      </p:sp>
+    </p:spTree>
+  </p:cSld>
+  <p:clrMapOvr>
+    <a:masterClrMapping/>
+  </p:clrMapOvr>
+</p:sld>
+</file>
+
+<file path=ppt/slides/slide3.xml><?xml version="1.0" encoding="utf-8"?>
+<p:sld xmlns:a="http://schemas.openxmlformats.org/drawingml/2006/main" xmlns:r="http://schemas.openxmlformats.org/officeDocument/2006/relationships" xmlns:p="http://schemas.openxmlformats.org/presentationml/2006/main">
+  <p:cSld name="Slide 3">
+    <p:bg>
+      <p:bgPr>
+        <a:solidFill>
+          <a:srgbClr val="FFFFFF"/>
+        </a:solidFill>
+      </p:bgPr>
+    </p:bg>
+    <p:spTree>
+      <p:nvGrpSpPr>
+        <p:cNvPr id="1" name=""/>
+        <p:cNvGrpSpPr/>
+        <p:nvPr/>
+      </p:nvGrpSpPr>
+      <p:grpSpPr>
+        <a:xfrm>
+          <a:off x="0" y="0"/>
+          <a:ext cx="0" cy="0"/>
+          <a:chOff x="0" y="0"/>
+          <a:chExt cx="0" cy="0"/>
+        </a:xfrm>
+      </p:grpSpPr>
+      <p:sp>
+        <p:nvSpPr>
+          <p:cNvPr id="2" name="Text 0"/>
+          <p:cNvSpPr txBox="1"/>
+          <p:nvPr/>
+        </p:nvSpPr>
+        <p:spPr>
+          <a:xfrm>
+            <a:off x="457200" y="274320"/>
+            <a:ext cx="11247120" cy="548640"/>
+          </a:xfrm>
+          <a:prstGeom prst="rect">
+            <a:avLst/>
+          </a:prstGeom>
+          <a:noFill/>
+          <a:ln/>
+        </p:spPr>
+        <p:txBody>
+          <a:bodyPr wrap="square" lIns="0" tIns="0" rIns="0" bIns="0" rtlCol="0" anchor="ctr"/>
+          <a:lstStyle/>
+          <a:p>
+            <a:pPr algn="l" indent="0" marL="0">
+              <a:buNone/>
+            </a:pPr>
+            <a:r>
+              <a:rPr lang="en-US" sz="3200" b="1" dirty="0">
+                <a:solidFill>
+                  <a:srgbClr val="1F3A5F"/>
+                </a:solidFill>
+                <a:latin typeface="Calibri" pitchFamily="34" charset="0"/>
+                <a:ea typeface="Calibri" pitchFamily="34" charset="-122"/>
+                <a:cs typeface="Calibri" pitchFamily="34" charset="-120"/>
+              </a:rPr>
+              <a:t>What's new</a:t>
+            </a:r>
+            <a:endParaRPr lang="en-US" sz="3200" dirty="0"/>
+          </a:p>
+        </p:txBody>
+      </p:sp>
+      <p:sp>
+        <p:nvSpPr>
+          <p:cNvPr id="3" name="Text 1"/>
+          <p:cNvSpPr txBox="1"/>
+          <p:nvPr/>
+        </p:nvSpPr>
+        <p:spPr>
+          <a:xfrm>
+            <a:off x="457200" y="841248"/>
+            <a:ext cx="11247120" cy="365760"/>
+          </a:xfrm>
+          <a:prstGeom prst="rect">
+            <a:avLst/>
+          </a:prstGeom>
+          <a:noFill/>
+          <a:ln/>
+        </p:spPr>
+        <p:txBody>
+          <a:bodyPr wrap="square" lIns="0" tIns="0" rIns="0" bIns="0" rtlCol="0" anchor="t"/>
+          <a:lstStyle/>
+          <a:p>
+            <a:pPr algn="l" indent="0" marL="0">
+              <a:buNone/>
+            </a:pPr>
+            <a:r>
+              <a:rPr lang="en-US" sz="1500" dirty="0">
+                <a:solidFill>
+                  <a:srgbClr val="5B6472"/>
+                </a:solidFill>
+                <a:latin typeface="Calibri" pitchFamily="34" charset="0"/>
+                <a:ea typeface="Calibri" pitchFamily="34" charset="-122"/>
+                <a:cs typeface="Calibri" pitchFamily="34" charset="-120"/>
+              </a:rPr>
+              <a:t>One sign-in, the right access for each role, and alerts when patients get worse</a:t>
+            </a:r>
+            <a:endParaRPr lang="en-US" sz="1500" dirty="0"/>
+          </a:p>
+        </p:txBody>
+      </p:sp>
+      <p:sp>
+        <p:nvSpPr>
+          <p:cNvPr id="4" name="Shape 2"/>
+          <p:cNvSpPr/>
+          <p:nvPr/>
+        </p:nvSpPr>
+        <p:spPr>
+          <a:xfrm>
+            <a:off x="457200" y="1417320"/>
+            <a:ext cx="5440680" cy="2377440"/>
+          </a:xfrm>
+          <a:prstGeom prst="roundRect">
+            <a:avLst>
+              <a:gd name="adj" fmla="val 4615"/>
+            </a:avLst>
+          </a:prstGeom>
+          <a:solidFill>
+            <a:srgbClr val="F8F9FA"/>
+          </a:solidFill>
+          <a:ln w="12700">
+            <a:solidFill>
+              <a:srgbClr val="D1D5DB"/>
+            </a:solidFill>
+            <a:prstDash val="solid"/>
+          </a:ln>
+        </p:spPr>
+      </p:sp>
+      <p:sp>
+        <p:nvSpPr>
+          <p:cNvPr id="5" name="Text 3"/>
+          <p:cNvSpPr txBox="1"/>
+          <p:nvPr/>
+        </p:nvSpPr>
+        <p:spPr>
+          <a:xfrm>
+            <a:off x="685800" y="1618488"/>
+            <a:ext cx="2743200" cy="411480"/>
+          </a:xfrm>
+          <a:prstGeom prst="roundRect">
+            <a:avLst>
+              <a:gd name="adj" fmla="val 17778"/>
+            </a:avLst>
+          </a:prstGeom>
+          <a:solidFill>
+            <a:srgbClr val="FFEC99"/>
+          </a:solidFill>
+          <a:ln w="12700">
+            <a:solidFill>
+              <a:srgbClr val="1F2937"/>
+            </a:solidFill>
+          </a:ln>
+        </p:spPr>
+        <p:txBody>
+          <a:bodyPr wrap="square" lIns="0" tIns="0" rIns="0" bIns="0" rtlCol="0" anchor="ctr"/>
+          <a:lstStyle/>
+          <a:p>
+            <a:pPr algn="ctr" indent="0" marL="0">
+              <a:buNone/>
+            </a:pPr>
+            <a:r>
+              <a:rPr lang="en-US" sz="1500" b="1" dirty="0">
+                <a:solidFill>
+                  <a:srgbClr val="1F2937"/>
+                </a:solidFill>
+                <a:latin typeface="Calibri" pitchFamily="34" charset="0"/>
+                <a:ea typeface="Calibri" pitchFamily="34" charset="-122"/>
+                <a:cs typeface="Calibri" pitchFamily="34" charset="-120"/>
+              </a:rPr>
+              <a:t>One platform</a:t>
+            </a:r>
+            <a:endParaRPr lang="en-US" sz="1500" dirty="0"/>
+          </a:p>
+        </p:txBody>
+      </p:sp>
+      <p:sp>
+        <p:nvSpPr>
+          <p:cNvPr id="6" name="Text 4"/>
+          <p:cNvSpPr txBox="1"/>
+          <p:nvPr/>
+        </p:nvSpPr>
+        <p:spPr>
+          <a:xfrm>
+            <a:off x="731520" y="2194560"/>
+            <a:ext cx="4892040" cy="1463040"/>
+          </a:xfrm>
+          <a:prstGeom prst="rect">
+            <a:avLst/>
+          </a:prstGeom>
+          <a:noFill/>
+          <a:ln/>
+        </p:spPr>
+        <p:txBody>
+          <a:bodyPr wrap="square" lIns="0" tIns="0" rIns="0" bIns="0" rtlCol="0" anchor="t"/>
+          <a:lstStyle/>
+          <a:p>
+            <a:pPr marL="342900" indent="-342900">
+              <a:spcAft>
+                <a:spcPts val="500"/>
+              </a:spcAft>
+              <a:buSzPct val="100000"/>
+              <a:buChar char="•"/>
+            </a:pPr>
+            <a:r>
+              <a:rPr lang="en-US" sz="1350" dirty="0">
+                <a:solidFill>
+                  <a:srgbClr val="1F2937"/>
+                </a:solidFill>
+                <a:latin typeface="Calibri" pitchFamily="34" charset="0"/>
+                <a:ea typeface="Calibri" pitchFamily="34" charset="-122"/>
+                <a:cs typeface="Calibri" pitchFamily="34" charset="-120"/>
+              </a:rPr>
+              <a:t>One sign-in for GLP-1 and Readmission</a:t>
+            </a:r>
+            <a:endParaRPr lang="en-US" sz="1350" dirty="0"/>
+          </a:p>
+          <a:p>
+            <a:pPr marL="342900" indent="-342900">
+              <a:spcAft>
+                <a:spcPts val="500"/>
+              </a:spcAft>
+              <a:buSzPct val="100000"/>
+              <a:buChar char="•"/>
+            </a:pPr>
+            <a:r>
+              <a:rPr lang="en-US" sz="1350" dirty="0">
+                <a:solidFill>
+                  <a:srgbClr val="1F2937"/>
+                </a:solidFill>
+                <a:latin typeface="Calibri" pitchFamily="34" charset="0"/>
+                <a:ea typeface="Calibri" pitchFamily="34" charset="-122"/>
+                <a:cs typeface="Calibri" pitchFamily="34" charset="-120"/>
+              </a:rPr>
+              <a:t>Sign-out fixed across both apps</a:t>
+            </a:r>
+            <a:endParaRPr lang="en-US" sz="1350" dirty="0"/>
+          </a:p>
+          <a:p>
+            <a:pPr marL="342900" indent="-342900">
+              <a:spcAft>
+                <a:spcPts val="500"/>
+              </a:spcAft>
+              <a:buSzPct val="100000"/>
+              <a:buChar char="•"/>
+            </a:pPr>
+            <a:r>
+              <a:rPr lang="en-US" sz="1350" dirty="0">
+                <a:solidFill>
+                  <a:srgbClr val="1F2937"/>
+                </a:solidFill>
+                <a:latin typeface="Calibri" pitchFamily="34" charset="0"/>
+                <a:ea typeface="Calibri" pitchFamily="34" charset="-122"/>
+                <a:cs typeface="Calibri" pitchFamily="34" charset="-120"/>
+              </a:rPr>
+              <a:t>Chrome's safety warning cleared by Google</a:t>
+            </a:r>
+            <a:endParaRPr lang="en-US" sz="1350" dirty="0"/>
+          </a:p>
+        </p:txBody>
+      </p:sp>
+      <p:sp>
+        <p:nvSpPr>
+          <p:cNvPr id="7" name="Shape 5"/>
+          <p:cNvSpPr/>
+          <p:nvPr/>
+        </p:nvSpPr>
+        <p:spPr>
+          <a:xfrm>
+            <a:off x="6291072" y="1417320"/>
+            <a:ext cx="5440680" cy="2377440"/>
+          </a:xfrm>
+          <a:prstGeom prst="roundRect">
+            <a:avLst>
+              <a:gd name="adj" fmla="val 4615"/>
+            </a:avLst>
+          </a:prstGeom>
+          <a:solidFill>
+            <a:srgbClr val="F8F9FA"/>
+          </a:solidFill>
+          <a:ln w="12700">
+            <a:solidFill>
+              <a:srgbClr val="D1D5DB"/>
+            </a:solidFill>
+            <a:prstDash val="solid"/>
+          </a:ln>
+        </p:spPr>
+      </p:sp>
+      <p:sp>
+        <p:nvSpPr>
+          <p:cNvPr id="8" name="Text 6"/>
+          <p:cNvSpPr txBox="1"/>
+          <p:nvPr/>
+        </p:nvSpPr>
+        <p:spPr>
+          <a:xfrm>
+            <a:off x="6519672" y="1618488"/>
+            <a:ext cx="2743200" cy="411480"/>
+          </a:xfrm>
+          <a:prstGeom prst="roundRect">
+            <a:avLst>
+              <a:gd name="adj" fmla="val 17778"/>
+            </a:avLst>
+          </a:prstGeom>
+          <a:solidFill>
+            <a:srgbClr val="A5D8FF"/>
+          </a:solidFill>
+          <a:ln w="12700">
+            <a:solidFill>
+              <a:srgbClr val="1F2937"/>
+            </a:solidFill>
+          </a:ln>
+        </p:spPr>
+        <p:txBody>
+          <a:bodyPr wrap="square" lIns="0" tIns="0" rIns="0" bIns="0" rtlCol="0" anchor="ctr"/>
+          <a:lstStyle/>
+          <a:p>
+            <a:pPr algn="ctr" indent="0" marL="0">
+              <a:buNone/>
+            </a:pPr>
+            <a:r>
+              <a:rPr lang="en-US" sz="1500" b="1" dirty="0">
+                <a:solidFill>
+                  <a:srgbClr val="1F2937"/>
+                </a:solidFill>
+                <a:latin typeface="Calibri" pitchFamily="34" charset="0"/>
+                <a:ea typeface="Calibri" pitchFamily="34" charset="-122"/>
+                <a:cs typeface="Calibri" pitchFamily="34" charset="-120"/>
+              </a:rPr>
+              <a:t>The right access</a:t>
+            </a:r>
+            <a:endParaRPr lang="en-US" sz="1500" dirty="0"/>
+          </a:p>
+        </p:txBody>
+      </p:sp>
+      <p:sp>
+        <p:nvSpPr>
+          <p:cNvPr id="9" name="Text 7"/>
+          <p:cNvSpPr txBox="1"/>
+          <p:nvPr/>
+        </p:nvSpPr>
+        <p:spPr>
+          <a:xfrm>
+            <a:off x="6565392" y="2194560"/>
+            <a:ext cx="4892040" cy="1463040"/>
+          </a:xfrm>
+          <a:prstGeom prst="rect">
+            <a:avLst/>
+          </a:prstGeom>
+          <a:noFill/>
+          <a:ln/>
+        </p:spPr>
+        <p:txBody>
+          <a:bodyPr wrap="square" lIns="0" tIns="0" rIns="0" bIns="0" rtlCol="0" anchor="t"/>
+          <a:lstStyle/>
+          <a:p>
+            <a:pPr marL="342900" indent="-342900">
+              <a:spcAft>
+                <a:spcPts val="500"/>
+              </a:spcAft>
+              <a:buSzPct val="100000"/>
+              <a:buChar char="•"/>
+            </a:pPr>
+            <a:r>
+              <a:rPr lang="en-US" sz="1350" dirty="0">
+                <a:solidFill>
+                  <a:srgbClr val="1F2937"/>
+                </a:solidFill>
+                <a:latin typeface="Calibri" pitchFamily="34" charset="0"/>
+                <a:ea typeface="Calibri" pitchFamily="34" charset="-122"/>
+                <a:cs typeface="Calibri" pitchFamily="34" charset="-120"/>
+              </a:rPr>
+              <a:t>Seven roles; hospitals kept apart</a:t>
+            </a:r>
+            <a:endParaRPr lang="en-US" sz="1350" dirty="0"/>
+          </a:p>
+          <a:p>
+            <a:pPr marL="342900" indent="-342900">
+              <a:spcAft>
+                <a:spcPts val="500"/>
+              </a:spcAft>
+              <a:buSzPct val="100000"/>
+              <a:buChar char="•"/>
+            </a:pPr>
+            <a:r>
+              <a:rPr lang="en-US" sz="1350" dirty="0">
+                <a:solidFill>
+                  <a:srgbClr val="1F2937"/>
+                </a:solidFill>
+                <a:latin typeface="Calibri" pitchFamily="34" charset="0"/>
+                <a:ea typeface="Calibri" pitchFamily="34" charset="-122"/>
+                <a:cs typeface="Calibri" pitchFamily="34" charset="-120"/>
+              </a:rPr>
+              <a:t>Doctors and nurses see their own patients, patients their own record</a:t>
+            </a:r>
+            <a:endParaRPr lang="en-US" sz="1350" dirty="0"/>
+          </a:p>
+          <a:p>
+            <a:pPr marL="342900" indent="-342900">
+              <a:spcAft>
+                <a:spcPts val="500"/>
+              </a:spcAft>
+              <a:buSzPct val="100000"/>
+              <a:buChar char="•"/>
+            </a:pPr>
+            <a:r>
+              <a:rPr lang="en-US" sz="1350" dirty="0">
+                <a:solidFill>
+                  <a:srgbClr val="1F2937"/>
+                </a:solidFill>
+                <a:latin typeface="Calibri" pitchFamily="34" charset="0"/>
+                <a:ea typeface="Calibri" pitchFamily="34" charset="-122"/>
+                <a:cs typeface="Calibri" pitchFamily="34" charset="-120"/>
+              </a:rPr>
+              <a:t>Clinical details need a logged reason</a:t>
+            </a:r>
+            <a:endParaRPr lang="en-US" sz="1350" dirty="0"/>
+          </a:p>
+          <a:p>
+            <a:pPr marL="342900" indent="-342900">
+              <a:spcAft>
+                <a:spcPts val="500"/>
+              </a:spcAft>
+              <a:buSzPct val="100000"/>
+              <a:buChar char="•"/>
+            </a:pPr>
+            <a:r>
+              <a:rPr lang="en-US" sz="1350" dirty="0">
+                <a:solidFill>
+                  <a:srgbClr val="1F2937"/>
+                </a:solidFill>
+                <a:latin typeface="Calibri" pitchFamily="34" charset="0"/>
+                <a:ea typeface="Calibri" pitchFamily="34" charset="-122"/>
+                <a:cs typeface="Calibri" pitchFamily="34" charset="-120"/>
+              </a:rPr>
+              <a:t>Sign up with role and hospital; that hospital approves</a:t>
+            </a:r>
+            <a:endParaRPr lang="en-US" sz="1350" dirty="0"/>
+          </a:p>
+        </p:txBody>
+      </p:sp>
+      <p:sp>
+        <p:nvSpPr>
+          <p:cNvPr id="10" name="Shape 8"/>
+          <p:cNvSpPr/>
+          <p:nvPr/>
+        </p:nvSpPr>
+        <p:spPr>
+          <a:xfrm>
+            <a:off x="457200" y="4023360"/>
+            <a:ext cx="5440680" cy="2377440"/>
+          </a:xfrm>
+          <a:prstGeom prst="roundRect">
+            <a:avLst>
+              <a:gd name="adj" fmla="val 4615"/>
+            </a:avLst>
+          </a:prstGeom>
+          <a:solidFill>
+            <a:srgbClr val="F8F9FA"/>
+          </a:solidFill>
+          <a:ln w="12700">
+            <a:solidFill>
+              <a:srgbClr val="D1D5DB"/>
+            </a:solidFill>
+            <a:prstDash val="solid"/>
+          </a:ln>
+        </p:spPr>
+      </p:sp>
+      <p:sp>
+        <p:nvSpPr>
+          <p:cNvPr id="11" name="Text 9"/>
+          <p:cNvSpPr txBox="1"/>
+          <p:nvPr/>
+        </p:nvSpPr>
+        <p:spPr>
+          <a:xfrm>
+            <a:off x="685800" y="4224528"/>
+            <a:ext cx="2743200" cy="411480"/>
+          </a:xfrm>
+          <a:prstGeom prst="roundRect">
+            <a:avLst>
+              <a:gd name="adj" fmla="val 17778"/>
+            </a:avLst>
+          </a:prstGeom>
+          <a:solidFill>
+            <a:srgbClr val="B2F2BB"/>
+          </a:solidFill>
+          <a:ln w="12700">
+            <a:solidFill>
+              <a:srgbClr val="1F2937"/>
+            </a:solidFill>
+          </a:ln>
+        </p:spPr>
+        <p:txBody>
+          <a:bodyPr wrap="square" lIns="0" tIns="0" rIns="0" bIns="0" rtlCol="0" anchor="ctr"/>
+          <a:lstStyle/>
+          <a:p>
+            <a:pPr algn="ctr" indent="0" marL="0">
+              <a:buNone/>
+            </a:pPr>
+            <a:r>
+              <a:rPr lang="en-US" sz="1500" b="1" dirty="0">
+                <a:solidFill>
+                  <a:srgbClr val="1F2937"/>
+                </a:solidFill>
+                <a:latin typeface="Calibri" pitchFamily="34" charset="0"/>
+                <a:ea typeface="Calibri" pitchFamily="34" charset="-122"/>
+                <a:cs typeface="Calibri" pitchFamily="34" charset="-120"/>
+              </a:rPr>
+              <a:t>Hospital dashboards</a:t>
+            </a:r>
+            <a:endParaRPr lang="en-US" sz="1500" dirty="0"/>
+          </a:p>
+        </p:txBody>
+      </p:sp>
+      <p:sp>
+        <p:nvSpPr>
+          <p:cNvPr id="12" name="Text 10"/>
+          <p:cNvSpPr txBox="1"/>
+          <p:nvPr/>
+        </p:nvSpPr>
+        <p:spPr>
+          <a:xfrm>
+            <a:off x="731520" y="4800600"/>
+            <a:ext cx="4892040" cy="1463040"/>
+          </a:xfrm>
+          <a:prstGeom prst="rect">
+            <a:avLst/>
+          </a:prstGeom>
+          <a:noFill/>
+          <a:ln/>
+        </p:spPr>
+        <p:txBody>
+          <a:bodyPr wrap="square" lIns="0" tIns="0" rIns="0" bIns="0" rtlCol="0" anchor="t"/>
+          <a:lstStyle/>
+          <a:p>
+            <a:pPr marL="342900" indent="-342900">
+              <a:spcAft>
+                <a:spcPts val="500"/>
+              </a:spcAft>
+              <a:buSzPct val="100000"/>
+              <a:buChar char="•"/>
+            </a:pPr>
+            <a:r>
+              <a:rPr lang="en-US" sz="1350" dirty="0">
+                <a:solidFill>
+                  <a:srgbClr val="1F2937"/>
+                </a:solidFill>
+                <a:latin typeface="Calibri" pitchFamily="34" charset="0"/>
+                <a:ea typeface="Calibri" pitchFamily="34" charset="-122"/>
+                <a:cs typeface="Calibri" pitchFamily="34" charset="-120"/>
+              </a:rPr>
+              <a:t>Overview, Patients and Staff in both apps</a:t>
+            </a:r>
+            <a:endParaRPr lang="en-US" sz="1350" dirty="0"/>
+          </a:p>
+          <a:p>
+            <a:pPr marL="342900" indent="-342900">
+              <a:spcAft>
+                <a:spcPts val="500"/>
+              </a:spcAft>
+              <a:buSzPct val="100000"/>
+              <a:buChar char="•"/>
+            </a:pPr>
+            <a:r>
+              <a:rPr lang="en-US" sz="1350" dirty="0">
+                <a:solidFill>
+                  <a:srgbClr val="1F2937"/>
+                </a:solidFill>
+                <a:latin typeface="Calibri" pitchFamily="34" charset="0"/>
+                <a:ea typeface="Calibri" pitchFamily="34" charset="-122"/>
+                <a:cs typeface="Calibri" pitchFamily="34" charset="-120"/>
+              </a:rPr>
+              <a:t>Several doctors and nurses per GLP-1 patient</a:t>
+            </a:r>
+            <a:endParaRPr lang="en-US" sz="1350" dirty="0"/>
+          </a:p>
+          <a:p>
+            <a:pPr marL="342900" indent="-342900">
+              <a:spcAft>
+                <a:spcPts val="500"/>
+              </a:spcAft>
+              <a:buSzPct val="100000"/>
+              <a:buChar char="•"/>
+            </a:pPr>
+            <a:r>
+              <a:rPr lang="en-US" sz="1350" dirty="0">
+                <a:solidFill>
+                  <a:srgbClr val="1F2937"/>
+                </a:solidFill>
+                <a:latin typeface="Calibri" pitchFamily="34" charset="0"/>
+                <a:ea typeface="Calibri" pitchFamily="34" charset="-122"/>
+                <a:cs typeface="Calibri" pitchFamily="34" charset="-120"/>
+              </a:rPr>
+              <a:t>Staff search and clearer staffing tiles</a:t>
+            </a:r>
+            <a:endParaRPr lang="en-US" sz="1350" dirty="0"/>
+          </a:p>
+          <a:p>
+            <a:pPr marL="342900" indent="-342900">
+              <a:spcAft>
+                <a:spcPts val="500"/>
+              </a:spcAft>
+              <a:buSzPct val="100000"/>
+              <a:buChar char="•"/>
+            </a:pPr>
+            <a:r>
+              <a:rPr lang="en-US" sz="1350" dirty="0">
+                <a:solidFill>
+                  <a:srgbClr val="1F2937"/>
+                </a:solidFill>
+                <a:latin typeface="Calibri" pitchFamily="34" charset="0"/>
+                <a:ea typeface="Calibri" pitchFamily="34" charset="-122"/>
+                <a:cs typeface="Calibri" pitchFamily="34" charset="-120"/>
+              </a:rPr>
+              <a:t>GLP-1: top dropout drivers, wasted spend by segment</a:t>
+            </a:r>
+            <a:endParaRPr lang="en-US" sz="1350" dirty="0"/>
+          </a:p>
+        </p:txBody>
+      </p:sp>
+      <p:sp>
+        <p:nvSpPr>
+          <p:cNvPr id="13" name="Shape 11"/>
+          <p:cNvSpPr/>
+          <p:nvPr/>
+        </p:nvSpPr>
+        <p:spPr>
+          <a:xfrm>
+            <a:off x="6291072" y="4023360"/>
+            <a:ext cx="5440680" cy="2377440"/>
+          </a:xfrm>
+          <a:prstGeom prst="roundRect">
+            <a:avLst>
+              <a:gd name="adj" fmla="val 4615"/>
+            </a:avLst>
+          </a:prstGeom>
+          <a:solidFill>
+            <a:srgbClr val="F8F9FA"/>
+          </a:solidFill>
+          <a:ln w="12700">
+            <a:solidFill>
+              <a:srgbClr val="D1D5DB"/>
+            </a:solidFill>
+            <a:prstDash val="solid"/>
+          </a:ln>
+        </p:spPr>
+      </p:sp>
+      <p:sp>
+        <p:nvSpPr>
+          <p:cNvPr id="14" name="Text 12"/>
+          <p:cNvSpPr txBox="1"/>
+          <p:nvPr/>
+        </p:nvSpPr>
+        <p:spPr>
+          <a:xfrm>
+            <a:off x="6519672" y="4224528"/>
+            <a:ext cx="2743200" cy="411480"/>
+          </a:xfrm>
+          <a:prstGeom prst="roundRect">
+            <a:avLst>
+              <a:gd name="adj" fmla="val 17778"/>
+            </a:avLst>
+          </a:prstGeom>
+          <a:solidFill>
+            <a:srgbClr val="FCC2D7"/>
+          </a:solidFill>
+          <a:ln w="12700">
+            <a:solidFill>
+              <a:srgbClr val="1F2937"/>
+            </a:solidFill>
+          </a:ln>
+        </p:spPr>
+        <p:txBody>
+          <a:bodyPr wrap="square" lIns="0" tIns="0" rIns="0" bIns="0" rtlCol="0" anchor="ctr"/>
+          <a:lstStyle/>
+          <a:p>
+            <a:pPr algn="ctr" indent="0" marL="0">
+              <a:buNone/>
+            </a:pPr>
+            <a:r>
+              <a:rPr lang="en-US" sz="1500" b="1" dirty="0">
+                <a:solidFill>
+                  <a:srgbClr val="1F2937"/>
+                </a:solidFill>
+                <a:latin typeface="Calibri" pitchFamily="34" charset="0"/>
+                <a:ea typeface="Calibri" pitchFamily="34" charset="-122"/>
+                <a:cs typeface="Calibri" pitchFamily="34" charset="-120"/>
+              </a:rPr>
+              <a:t>Readmission</a:t>
+            </a:r>
+            <a:endParaRPr lang="en-US" sz="1500" dirty="0"/>
+          </a:p>
+        </p:txBody>
+      </p:sp>
+      <p:sp>
+        <p:nvSpPr>
+          <p:cNvPr id="15" name="Text 13"/>
+          <p:cNvSpPr txBox="1"/>
+          <p:nvPr/>
+        </p:nvSpPr>
+        <p:spPr>
+          <a:xfrm>
+            <a:off x="6565392" y="4800600"/>
+            <a:ext cx="4892040" cy="1463040"/>
+          </a:xfrm>
+          <a:prstGeom prst="rect">
+            <a:avLst/>
+          </a:prstGeom>
+          <a:noFill/>
+          <a:ln/>
+        </p:spPr>
+        <p:txBody>
+          <a:bodyPr wrap="square" lIns="0" tIns="0" rIns="0" bIns="0" rtlCol="0" anchor="t"/>
+          <a:lstStyle/>
+          <a:p>
+            <a:pPr marL="342900" indent="-342900">
+              <a:spcAft>
+                <a:spcPts val="500"/>
+              </a:spcAft>
+              <a:buSzPct val="100000"/>
+              <a:buChar char="•"/>
+            </a:pPr>
+            <a:r>
+              <a:rPr lang="en-US" sz="1350" dirty="0">
+                <a:solidFill>
+                  <a:srgbClr val="1F2937"/>
+                </a:solidFill>
+                <a:latin typeface="Calibri" pitchFamily="34" charset="0"/>
+                <a:ea typeface="Calibri" pitchFamily="34" charset="-122"/>
+                <a:cs typeface="Calibri" pitchFamily="34" charset="-120"/>
+              </a:rPr>
+              <a:t>Doctors alerted when their patients get worse</a:t>
+            </a:r>
+            <a:endParaRPr lang="en-US" sz="1350" dirty="0"/>
+          </a:p>
+          <a:p>
+            <a:pPr marL="342900" indent="-342900">
+              <a:spcAft>
+                <a:spcPts val="500"/>
+              </a:spcAft>
+              <a:buSzPct val="100000"/>
+              <a:buChar char="•"/>
+            </a:pPr>
+            <a:r>
+              <a:rPr lang="en-US" sz="1350" dirty="0">
+                <a:solidFill>
+                  <a:srgbClr val="1F2937"/>
+                </a:solidFill>
+                <a:latin typeface="Calibri" pitchFamily="34" charset="0"/>
+                <a:ea typeface="Calibri" pitchFamily="34" charset="-122"/>
+                <a:cs typeface="Calibri" pitchFamily="34" charset="-120"/>
+              </a:rPr>
+              <a:t>Chatbot answers within each user's access</a:t>
+            </a:r>
+            <a:endParaRPr lang="en-US" sz="1350" dirty="0"/>
+          </a:p>
+          <a:p>
+            <a:pPr marL="342900" indent="-342900">
+              <a:spcAft>
+                <a:spcPts val="500"/>
+              </a:spcAft>
+              <a:buSzPct val="100000"/>
+              <a:buChar char="•"/>
+            </a:pPr>
+            <a:r>
+              <a:rPr lang="en-US" sz="1350" dirty="0">
+                <a:solidFill>
+                  <a:srgbClr val="1F2937"/>
+                </a:solidFill>
+                <a:latin typeface="Calibri" pitchFamily="34" charset="0"/>
+                <a:ea typeface="Calibri" pitchFamily="34" charset="-122"/>
+                <a:cs typeface="Calibri" pitchFamily="34" charset="-120"/>
+              </a:rPr>
+              <a:t>Same opening screen as GLP-1</a:t>
+            </a:r>
+            <a:endParaRPr lang="en-US" sz="1350" dirty="0"/>
           </a:p>
         </p:txBody>
       </p:sp>
